--- a/pre/LuxeHotel.pptx
+++ b/pre/LuxeHotel.pptx
@@ -36037,7 +36037,7 @@
         </p:nvSpPr>
         <p:spPr>
           <a:xfrm>
-            <a:off x="2241450" y="3056585"/>
+            <a:off x="2241450" y="3756299"/>
             <a:ext cx="4661100" cy="1122900"/>
           </a:xfrm>
           <a:prstGeom prst="rect">
